--- a/decks/day2/module-6-authoring-tools.pptx
+++ b/decks/day2/module-6-authoring-tools.pptx
@@ -2773,7 +2773,7 @@
                 <a:ea typeface="Calibri" pitchFamily="34" charset="-122"/>
                 <a:cs typeface="Calibri" pitchFamily="34" charset="-120"/>
               </a:rPr>
-              <a:t>Return types matter more than most attendees realize:</a:t>
+              <a:t>Return types matter more than you might realize:</a:t>
             </a:r>
             <a:endParaRPr lang="en-US" sz="1300" dirty="0"/>
           </a:p>
@@ -5534,7 +5534,7 @@
                 <a:ea typeface="Calibri" pitchFamily="34" charset="-122"/>
                 <a:cs typeface="Calibri" pitchFamily="34" charset="-120"/>
               </a:rPr>
-              <a:t>Attendees learned eval Day 2 Module 3 for retrieval. Same shape for tool use:</a:t>
+              <a:t>You learned eval Day 2 Module 3 for retrieval. Same shape for tool use:</a:t>
             </a:r>
             <a:endParaRPr lang="en-US" sz="1200" dirty="0"/>
           </a:p>

--- a/decks/day2/module-6-authoring-tools.pptx
+++ b/decks/day2/module-6-authoring-tools.pptx
@@ -1349,7 +1349,7 @@
               <a:rPr lang="en-US" dirty="0"/>
               <a:t>• Six-bullet recap
 • Emphasize: authoring pattern choice, four-part docstring, isolation testing
-• Bridge to Module 7 — Day 2 synthesis
+• Bridge to Module 7 — Day 2 lab kickoff
 • Time check — Modules 1+2+3+4+5+6 = ~195 min in against 240 budget</a:t>
             </a:r>
             <a:endParaRPr lang="en-US" dirty="0"/>
@@ -7147,7 +7147,7 @@
                 <a:ea typeface="Calibri" pitchFamily="34" charset="-122"/>
                 <a:cs typeface="Calibri" pitchFamily="34" charset="-120"/>
               </a:rPr>
-              <a:t>Combining knowledge + tools — the module that brings Day 2 together.</a:t>
+              <a:t>Day 2 lab kickoff — the docs-assistant with ticket triage + evaluation.</a:t>
             </a:r>
             <a:endParaRPr lang="en-US" sz="1600" dirty="0"/>
           </a:p>
